--- a/docs/songs/i could sing of your love forever.pptx
+++ b/docs/songs/i could sing of your love forever.pptx
@@ -7,8 +7,12 @@
   <p:sldIdLst>
     <p:sldId id="453" r:id="rId2"/>
     <p:sldId id="447" r:id="rId3"/>
-    <p:sldId id="448" r:id="rId4"/>
-    <p:sldId id="449" r:id="rId5"/>
+    <p:sldId id="1606" r:id="rId4"/>
+    <p:sldId id="448" r:id="rId5"/>
+    <p:sldId id="1608" r:id="rId6"/>
+    <p:sldId id="1609" r:id="rId7"/>
+    <p:sldId id="449" r:id="rId8"/>
+    <p:sldId id="1607" r:id="rId9"/>
   </p:sldIdLst>
   <p:sldSz cx="9144000" cy="6858000" type="screen4x3"/>
   <p:notesSz cx="6858000" cy="9144000"/>
@@ -308,7 +312,7 @@
             <a:fld id="{26EA1CF3-4A15-4CBF-9A5A-6A56C368BE71}" type="datetimeFigureOut">
               <a:rPr lang="en-GB" smtClean="0"/>
               <a:pPr/>
-              <a:t>15/11/2025</a:t>
+              <a:t>03/08/2026</a:t>
             </a:fld>
             <a:endParaRPr lang="en-GB"/>
           </a:p>
@@ -475,7 +479,7 @@
             <a:fld id="{26EA1CF3-4A15-4CBF-9A5A-6A56C368BE71}" type="datetimeFigureOut">
               <a:rPr lang="en-GB" smtClean="0"/>
               <a:pPr/>
-              <a:t>15/11/2025</a:t>
+              <a:t>03/08/2026</a:t>
             </a:fld>
             <a:endParaRPr lang="en-GB"/>
           </a:p>
@@ -652,7 +656,7 @@
             <a:fld id="{26EA1CF3-4A15-4CBF-9A5A-6A56C368BE71}" type="datetimeFigureOut">
               <a:rPr lang="en-GB" smtClean="0"/>
               <a:pPr/>
-              <a:t>15/11/2025</a:t>
+              <a:t>03/08/2026</a:t>
             </a:fld>
             <a:endParaRPr lang="en-GB"/>
           </a:p>
@@ -819,7 +823,7 @@
             <a:fld id="{26EA1CF3-4A15-4CBF-9A5A-6A56C368BE71}" type="datetimeFigureOut">
               <a:rPr lang="en-GB" smtClean="0"/>
               <a:pPr/>
-              <a:t>15/11/2025</a:t>
+              <a:t>03/08/2026</a:t>
             </a:fld>
             <a:endParaRPr lang="en-GB"/>
           </a:p>
@@ -1062,7 +1066,7 @@
             <a:fld id="{26EA1CF3-4A15-4CBF-9A5A-6A56C368BE71}" type="datetimeFigureOut">
               <a:rPr lang="en-GB" smtClean="0"/>
               <a:pPr/>
-              <a:t>15/11/2025</a:t>
+              <a:t>03/08/2026</a:t>
             </a:fld>
             <a:endParaRPr lang="en-GB"/>
           </a:p>
@@ -1347,7 +1351,7 @@
             <a:fld id="{26EA1CF3-4A15-4CBF-9A5A-6A56C368BE71}" type="datetimeFigureOut">
               <a:rPr lang="en-GB" smtClean="0"/>
               <a:pPr/>
-              <a:t>15/11/2025</a:t>
+              <a:t>03/08/2026</a:t>
             </a:fld>
             <a:endParaRPr lang="en-GB"/>
           </a:p>
@@ -1766,7 +1770,7 @@
             <a:fld id="{26EA1CF3-4A15-4CBF-9A5A-6A56C368BE71}" type="datetimeFigureOut">
               <a:rPr lang="en-GB" smtClean="0"/>
               <a:pPr/>
-              <a:t>15/11/2025</a:t>
+              <a:t>03/08/2026</a:t>
             </a:fld>
             <a:endParaRPr lang="en-GB"/>
           </a:p>
@@ -1881,7 +1885,7 @@
             <a:fld id="{26EA1CF3-4A15-4CBF-9A5A-6A56C368BE71}" type="datetimeFigureOut">
               <a:rPr lang="en-GB" smtClean="0"/>
               <a:pPr/>
-              <a:t>15/11/2025</a:t>
+              <a:t>03/08/2026</a:t>
             </a:fld>
             <a:endParaRPr lang="en-GB"/>
           </a:p>
@@ -1973,7 +1977,7 @@
             <a:fld id="{26EA1CF3-4A15-4CBF-9A5A-6A56C368BE71}" type="datetimeFigureOut">
               <a:rPr lang="en-GB" smtClean="0"/>
               <a:pPr/>
-              <a:t>15/11/2025</a:t>
+              <a:t>03/08/2026</a:t>
             </a:fld>
             <a:endParaRPr lang="en-GB"/>
           </a:p>
@@ -2247,7 +2251,7 @@
             <a:fld id="{26EA1CF3-4A15-4CBF-9A5A-6A56C368BE71}" type="datetimeFigureOut">
               <a:rPr lang="en-GB" smtClean="0"/>
               <a:pPr/>
-              <a:t>15/11/2025</a:t>
+              <a:t>03/08/2026</a:t>
             </a:fld>
             <a:endParaRPr lang="en-GB"/>
           </a:p>
@@ -2497,7 +2501,7 @@
             <a:fld id="{26EA1CF3-4A15-4CBF-9A5A-6A56C368BE71}" type="datetimeFigureOut">
               <a:rPr lang="en-GB" smtClean="0"/>
               <a:pPr/>
-              <a:t>15/11/2025</a:t>
+              <a:t>03/08/2026</a:t>
             </a:fld>
             <a:endParaRPr lang="en-GB"/>
           </a:p>
@@ -2710,7 +2714,7 @@
             <a:fld id="{26EA1CF3-4A15-4CBF-9A5A-6A56C368BE71}" type="datetimeFigureOut">
               <a:rPr lang="en-GB" smtClean="0"/>
               <a:pPr/>
-              <a:t>15/11/2025</a:t>
+              <a:t>03/08/2026</a:t>
             </a:fld>
             <a:endParaRPr lang="en-GB"/>
           </a:p>
@@ -3111,7 +3115,7 @@
           </a:p>
           <a:p>
             <a:r>
-              <a:rPr lang="en-GB" sz="6600" dirty="0">
+              <a:rPr lang="en-GB" sz="4400" dirty="0">
                 <a:solidFill>
                   <a:srgbClr val="00A3E0"/>
                 </a:solidFill>
@@ -3119,7 +3123,7 @@
               </a:rPr>
               <a:t>I Could Sing Of Your Love Forever</a:t>
             </a:r>
-            <a:endParaRPr lang="en-GB" sz="6600" b="0" i="0" dirty="0">
+            <a:endParaRPr lang="en-GB" sz="4400" b="0" i="0" dirty="0">
               <a:solidFill>
                 <a:srgbClr val="00A3E0"/>
               </a:solidFill>
@@ -3241,7 +3245,7 @@
         </p:nvSpPr>
         <p:spPr>
           <a:xfrm>
-            <a:off x="323528" y="1268760"/>
+            <a:off x="203118" y="836712"/>
             <a:ext cx="8640960" cy="5400600"/>
           </a:xfrm>
         </p:spPr>
@@ -3288,46 +3292,6 @@
                 </a:solidFill>
               </a:rPr>
               <a:t>And let the Healer set me free</a:t>
-            </a:r>
-          </a:p>
-          <a:p>
-            <a:r>
-              <a:rPr lang="en-GB" sz="3600" dirty="0">
-                <a:solidFill>
-                  <a:schemeClr val="bg1"/>
-                </a:solidFill>
-              </a:rPr>
-              <a:t>I'm happy to be in the truth</a:t>
-            </a:r>
-          </a:p>
-          <a:p>
-            <a:r>
-              <a:rPr lang="en-GB" sz="3600" dirty="0">
-                <a:solidFill>
-                  <a:schemeClr val="bg1"/>
-                </a:solidFill>
-              </a:rPr>
-              <a:t>And I will daily lift my hands</a:t>
-            </a:r>
-          </a:p>
-          <a:p>
-            <a:r>
-              <a:rPr lang="en-GB" sz="3600" dirty="0">
-                <a:solidFill>
-                  <a:schemeClr val="bg1"/>
-                </a:solidFill>
-              </a:rPr>
-              <a:t>For I will always sing</a:t>
-            </a:r>
-          </a:p>
-          <a:p>
-            <a:r>
-              <a:rPr lang="en-GB" sz="3600" dirty="0">
-                <a:solidFill>
-                  <a:schemeClr val="bg1"/>
-                </a:solidFill>
-              </a:rPr>
-              <a:t>Of when Your love came down yeah</a:t>
             </a:r>
           </a:p>
         </p:txBody>
@@ -3360,7 +3324,7 @@
                   <a:schemeClr val="bg1"/>
                 </a:solidFill>
               </a:rPr>
-              <a:t>1/6</a:t>
+              <a:t>1/7</a:t>
             </a:r>
           </a:p>
         </p:txBody>
@@ -3383,7 +3347,13 @@
   <p:cSld>
     <p:spTree>
       <p:nvGrpSpPr>
-        <p:cNvPr id="1" name=""/>
+        <p:cNvPr id="1" name="">
+          <a:extLst>
+            <a:ext uri="{FF2B5EF4-FFF2-40B4-BE49-F238E27FC236}">
+              <a16:creationId xmlns:a16="http://schemas.microsoft.com/office/drawing/2014/main" id="{D9E9EE07-FF5C-ABA4-4E25-E493DA1C9087}"/>
+            </a:ext>
+          </a:extLst>
+        </p:cNvPr>
         <p:cNvGrpSpPr/>
         <p:nvPr/>
       </p:nvGrpSpPr>
@@ -3397,7 +3367,13 @@
       </p:grpSpPr>
       <p:sp>
         <p:nvSpPr>
-          <p:cNvPr id="3" name="Subtitle 2"/>
+          <p:cNvPr id="3" name="Subtitle 2">
+            <a:extLst>
+              <a:ext uri="{FF2B5EF4-FFF2-40B4-BE49-F238E27FC236}">
+                <a16:creationId xmlns:a16="http://schemas.microsoft.com/office/drawing/2014/main" id="{80030D1E-D91F-9A9A-384B-52927DE87125}"/>
+              </a:ext>
+            </a:extLst>
+          </p:cNvPr>
           <p:cNvSpPr>
             <a:spLocks noGrp="1"/>
           </p:cNvSpPr>
@@ -3407,7 +3383,7 @@
         </p:nvSpPr>
         <p:spPr>
           <a:xfrm>
-            <a:off x="323528" y="1268760"/>
+            <a:off x="203118" y="836712"/>
             <a:ext cx="8640960" cy="5400600"/>
           </a:xfrm>
         </p:spPr>
@@ -3423,7 +3399,7 @@
                   <a:schemeClr val="bg1"/>
                 </a:solidFill>
               </a:rPr>
-              <a:t>I could sing of Your love forever</a:t>
+              <a:t>I'm happy to be in the truth</a:t>
             </a:r>
           </a:p>
           <a:p>
@@ -3433,7 +3409,7 @@
                   <a:schemeClr val="bg1"/>
                 </a:solidFill>
               </a:rPr>
-              <a:t>I could sing of Your love forever</a:t>
+              <a:t>And I will daily lift my hands</a:t>
             </a:r>
           </a:p>
           <a:p>
@@ -3443,7 +3419,7 @@
                   <a:schemeClr val="bg1"/>
                 </a:solidFill>
               </a:rPr>
-              <a:t>I could sing of Your love forever</a:t>
+              <a:t>For I will always sing</a:t>
             </a:r>
           </a:p>
           <a:p>
@@ -3453,14 +3429,20 @@
                   <a:schemeClr val="bg1"/>
                 </a:solidFill>
               </a:rPr>
-              <a:t>I could sing of Your love forever</a:t>
-            </a:r>
-          </a:p>
-        </p:txBody>
-      </p:sp>
-      <p:sp>
-        <p:nvSpPr>
-          <p:cNvPr id="4" name="TextBox 3"/>
+              <a:t>Of when Your love came down</a:t>
+            </a:r>
+          </a:p>
+        </p:txBody>
+      </p:sp>
+      <p:sp>
+        <p:nvSpPr>
+          <p:cNvPr id="4" name="TextBox 3">
+            <a:extLst>
+              <a:ext uri="{FF2B5EF4-FFF2-40B4-BE49-F238E27FC236}">
+                <a16:creationId xmlns:a16="http://schemas.microsoft.com/office/drawing/2014/main" id="{5D211610-470F-4FAF-386F-6750378548F5}"/>
+              </a:ext>
+            </a:extLst>
+          </p:cNvPr>
           <p:cNvSpPr txBox="1"/>
           <p:nvPr/>
         </p:nvSpPr>
@@ -3486,7 +3468,7 @@
                   <a:schemeClr val="bg1"/>
                 </a:solidFill>
               </a:rPr>
-              <a:t>2/6</a:t>
+              <a:t>2/7</a:t>
             </a:r>
           </a:p>
         </p:txBody>
@@ -3494,7 +3476,7 @@
     </p:spTree>
     <p:extLst>
       <p:ext uri="{BB962C8B-B14F-4D97-AF65-F5344CB8AC3E}">
-        <p14:creationId xmlns:p14="http://schemas.microsoft.com/office/powerpoint/2010/main" val="1947288832"/>
+        <p14:creationId xmlns:p14="http://schemas.microsoft.com/office/powerpoint/2010/main" val="2477913983"/>
       </p:ext>
     </p:extLst>
   </p:cSld>
@@ -3533,8 +3515,8 @@
         </p:nvSpPr>
         <p:spPr>
           <a:xfrm>
-            <a:off x="107504" y="980728"/>
-            <a:ext cx="8856984" cy="5688632"/>
+            <a:off x="251520" y="836712"/>
+            <a:ext cx="8640960" cy="5400600"/>
           </a:xfrm>
         </p:spPr>
         <p:txBody>
@@ -3549,7 +3531,7 @@
                   <a:schemeClr val="bg1"/>
                 </a:solidFill>
               </a:rPr>
-              <a:t>Oh I feel like dancing</a:t>
+              <a:t>I could sing of Your love forever</a:t>
             </a:r>
           </a:p>
           <a:p>
@@ -3559,7 +3541,7 @@
                   <a:schemeClr val="bg1"/>
                 </a:solidFill>
               </a:rPr>
-              <a:t>It's foolishness I know</a:t>
+              <a:t>I could sing of Your love forever</a:t>
             </a:r>
           </a:p>
           <a:p>
@@ -3569,7 +3551,7 @@
                   <a:schemeClr val="bg1"/>
                 </a:solidFill>
               </a:rPr>
-              <a:t>But when the world has seen the light</a:t>
+              <a:t>I could sing of Your love forever</a:t>
             </a:r>
           </a:p>
           <a:p>
@@ -3579,7 +3561,7 @@
                   <a:schemeClr val="bg1"/>
                 </a:solidFill>
               </a:rPr>
-              <a:t>They will dance with joy like we're dancing now</a:t>
+              <a:t>I could sing of Your love forever</a:t>
             </a:r>
           </a:p>
         </p:txBody>
@@ -3612,7 +3594,421 @@
                   <a:schemeClr val="bg1"/>
                 </a:solidFill>
               </a:rPr>
-              <a:t>3/6</a:t>
+              <a:t>3/7</a:t>
+            </a:r>
+          </a:p>
+        </p:txBody>
+      </p:sp>
+    </p:spTree>
+    <p:extLst>
+      <p:ext uri="{BB962C8B-B14F-4D97-AF65-F5344CB8AC3E}">
+        <p14:creationId xmlns:p14="http://schemas.microsoft.com/office/powerpoint/2010/main" val="1947288832"/>
+      </p:ext>
+    </p:extLst>
+  </p:cSld>
+  <p:clrMapOvr>
+    <a:masterClrMapping/>
+  </p:clrMapOvr>
+</p:sld>
+</file>
+
+<file path=ppt/slides/slide5.xml><?xml version="1.0" encoding="utf-8"?>
+<p:sld xmlns:a="http://schemas.openxmlformats.org/drawingml/2006/main" xmlns:r="http://schemas.openxmlformats.org/officeDocument/2006/relationships" xmlns:p="http://schemas.openxmlformats.org/presentationml/2006/main">
+  <p:cSld>
+    <p:spTree>
+      <p:nvGrpSpPr>
+        <p:cNvPr id="1" name="">
+          <a:extLst>
+            <a:ext uri="{FF2B5EF4-FFF2-40B4-BE49-F238E27FC236}">
+              <a16:creationId xmlns:a16="http://schemas.microsoft.com/office/drawing/2014/main" id="{75FF9B45-C09D-B638-E9DA-1752ED1DBB82}"/>
+            </a:ext>
+          </a:extLst>
+        </p:cNvPr>
+        <p:cNvGrpSpPr/>
+        <p:nvPr/>
+      </p:nvGrpSpPr>
+      <p:grpSpPr>
+        <a:xfrm>
+          <a:off x="0" y="0"/>
+          <a:ext cx="0" cy="0"/>
+          <a:chOff x="0" y="0"/>
+          <a:chExt cx="0" cy="0"/>
+        </a:xfrm>
+      </p:grpSpPr>
+      <p:sp>
+        <p:nvSpPr>
+          <p:cNvPr id="3" name="Subtitle 2">
+            <a:extLst>
+              <a:ext uri="{FF2B5EF4-FFF2-40B4-BE49-F238E27FC236}">
+                <a16:creationId xmlns:a16="http://schemas.microsoft.com/office/drawing/2014/main" id="{61FA6DDB-C12F-A328-1A66-3B160499DD7D}"/>
+              </a:ext>
+            </a:extLst>
+          </p:cNvPr>
+          <p:cNvSpPr>
+            <a:spLocks noGrp="1"/>
+          </p:cNvSpPr>
+          <p:nvPr>
+            <p:ph type="subTitle" idx="1"/>
+          </p:nvPr>
+        </p:nvSpPr>
+        <p:spPr>
+          <a:xfrm>
+            <a:off x="203118" y="836712"/>
+            <a:ext cx="8640960" cy="5400600"/>
+          </a:xfrm>
+        </p:spPr>
+        <p:txBody>
+          <a:bodyPr>
+            <a:noAutofit/>
+          </a:bodyPr>
+          <a:lstStyle/>
+          <a:p>
+            <a:r>
+              <a:rPr lang="en-GB" sz="3600" dirty="0">
+                <a:solidFill>
+                  <a:schemeClr val="bg1"/>
+                </a:solidFill>
+              </a:rPr>
+              <a:t>Over the mountains and the sea</a:t>
+            </a:r>
+          </a:p>
+          <a:p>
+            <a:r>
+              <a:rPr lang="en-GB" sz="3600" dirty="0">
+                <a:solidFill>
+                  <a:schemeClr val="bg1"/>
+                </a:solidFill>
+              </a:rPr>
+              <a:t>Your river runs with love for me</a:t>
+            </a:r>
+          </a:p>
+          <a:p>
+            <a:r>
+              <a:rPr lang="en-GB" sz="3600" dirty="0">
+                <a:solidFill>
+                  <a:schemeClr val="bg1"/>
+                </a:solidFill>
+              </a:rPr>
+              <a:t>And I will open up my heart</a:t>
+            </a:r>
+          </a:p>
+          <a:p>
+            <a:r>
+              <a:rPr lang="en-GB" sz="3600" dirty="0">
+                <a:solidFill>
+                  <a:schemeClr val="bg1"/>
+                </a:solidFill>
+              </a:rPr>
+              <a:t>And let the Healer set me free</a:t>
+            </a:r>
+          </a:p>
+        </p:txBody>
+      </p:sp>
+      <p:sp>
+        <p:nvSpPr>
+          <p:cNvPr id="4" name="TextBox 3">
+            <a:extLst>
+              <a:ext uri="{FF2B5EF4-FFF2-40B4-BE49-F238E27FC236}">
+                <a16:creationId xmlns:a16="http://schemas.microsoft.com/office/drawing/2014/main" id="{B68171C3-5ED6-5A08-7F71-BD06DDD243A2}"/>
+              </a:ext>
+            </a:extLst>
+          </p:cNvPr>
+          <p:cNvSpPr txBox="1"/>
+          <p:nvPr/>
+        </p:nvSpPr>
+        <p:spPr>
+          <a:xfrm>
+            <a:off x="8529729" y="0"/>
+            <a:ext cx="628698" cy="461665"/>
+          </a:xfrm>
+          <a:prstGeom prst="rect">
+            <a:avLst/>
+          </a:prstGeom>
+          <a:noFill/>
+        </p:spPr>
+        <p:txBody>
+          <a:bodyPr wrap="none" rtlCol="0">
+            <a:spAutoFit/>
+          </a:bodyPr>
+          <a:lstStyle/>
+          <a:p>
+            <a:r>
+              <a:rPr lang="en-GB" sz="2400" b="1" dirty="0">
+                <a:solidFill>
+                  <a:schemeClr val="bg1"/>
+                </a:solidFill>
+              </a:rPr>
+              <a:t>4/7</a:t>
+            </a:r>
+          </a:p>
+        </p:txBody>
+      </p:sp>
+    </p:spTree>
+    <p:extLst>
+      <p:ext uri="{BB962C8B-B14F-4D97-AF65-F5344CB8AC3E}">
+        <p14:creationId xmlns:p14="http://schemas.microsoft.com/office/powerpoint/2010/main" val="1554324201"/>
+      </p:ext>
+    </p:extLst>
+  </p:cSld>
+  <p:clrMapOvr>
+    <a:masterClrMapping/>
+  </p:clrMapOvr>
+</p:sld>
+</file>
+
+<file path=ppt/slides/slide6.xml><?xml version="1.0" encoding="utf-8"?>
+<p:sld xmlns:a="http://schemas.openxmlformats.org/drawingml/2006/main" xmlns:r="http://schemas.openxmlformats.org/officeDocument/2006/relationships" xmlns:p="http://schemas.openxmlformats.org/presentationml/2006/main">
+  <p:cSld>
+    <p:spTree>
+      <p:nvGrpSpPr>
+        <p:cNvPr id="1" name="">
+          <a:extLst>
+            <a:ext uri="{FF2B5EF4-FFF2-40B4-BE49-F238E27FC236}">
+              <a16:creationId xmlns:a16="http://schemas.microsoft.com/office/drawing/2014/main" id="{107AD650-6D02-4EA1-DBED-0CADAC2FB94E}"/>
+            </a:ext>
+          </a:extLst>
+        </p:cNvPr>
+        <p:cNvGrpSpPr/>
+        <p:nvPr/>
+      </p:nvGrpSpPr>
+      <p:grpSpPr>
+        <a:xfrm>
+          <a:off x="0" y="0"/>
+          <a:ext cx="0" cy="0"/>
+          <a:chOff x="0" y="0"/>
+          <a:chExt cx="0" cy="0"/>
+        </a:xfrm>
+      </p:grpSpPr>
+      <p:sp>
+        <p:nvSpPr>
+          <p:cNvPr id="3" name="Subtitle 2">
+            <a:extLst>
+              <a:ext uri="{FF2B5EF4-FFF2-40B4-BE49-F238E27FC236}">
+                <a16:creationId xmlns:a16="http://schemas.microsoft.com/office/drawing/2014/main" id="{7D5C6ED8-240B-FC24-7DCD-C137D4F2DE26}"/>
+              </a:ext>
+            </a:extLst>
+          </p:cNvPr>
+          <p:cNvSpPr>
+            <a:spLocks noGrp="1"/>
+          </p:cNvSpPr>
+          <p:nvPr>
+            <p:ph type="subTitle" idx="1"/>
+          </p:nvPr>
+        </p:nvSpPr>
+        <p:spPr>
+          <a:xfrm>
+            <a:off x="203118" y="836712"/>
+            <a:ext cx="8640960" cy="5400600"/>
+          </a:xfrm>
+        </p:spPr>
+        <p:txBody>
+          <a:bodyPr>
+            <a:noAutofit/>
+          </a:bodyPr>
+          <a:lstStyle/>
+          <a:p>
+            <a:r>
+              <a:rPr lang="en-GB" sz="3600" dirty="0">
+                <a:solidFill>
+                  <a:schemeClr val="bg1"/>
+                </a:solidFill>
+              </a:rPr>
+              <a:t>I'm happy to be in the truth</a:t>
+            </a:r>
+          </a:p>
+          <a:p>
+            <a:r>
+              <a:rPr lang="en-GB" sz="3600" dirty="0">
+                <a:solidFill>
+                  <a:schemeClr val="bg1"/>
+                </a:solidFill>
+              </a:rPr>
+              <a:t>And I will daily lift my hands</a:t>
+            </a:r>
+          </a:p>
+          <a:p>
+            <a:r>
+              <a:rPr lang="en-GB" sz="3600" dirty="0">
+                <a:solidFill>
+                  <a:schemeClr val="bg1"/>
+                </a:solidFill>
+              </a:rPr>
+              <a:t>For I will always sing</a:t>
+            </a:r>
+          </a:p>
+          <a:p>
+            <a:r>
+              <a:rPr lang="en-GB" sz="3600" dirty="0">
+                <a:solidFill>
+                  <a:schemeClr val="bg1"/>
+                </a:solidFill>
+              </a:rPr>
+              <a:t>Of when Your love came down</a:t>
+            </a:r>
+          </a:p>
+        </p:txBody>
+      </p:sp>
+      <p:sp>
+        <p:nvSpPr>
+          <p:cNvPr id="4" name="TextBox 3">
+            <a:extLst>
+              <a:ext uri="{FF2B5EF4-FFF2-40B4-BE49-F238E27FC236}">
+                <a16:creationId xmlns:a16="http://schemas.microsoft.com/office/drawing/2014/main" id="{5B3BE243-659C-D498-3B21-77F831A512C6}"/>
+              </a:ext>
+            </a:extLst>
+          </p:cNvPr>
+          <p:cNvSpPr txBox="1"/>
+          <p:nvPr/>
+        </p:nvSpPr>
+        <p:spPr>
+          <a:xfrm>
+            <a:off x="8529729" y="0"/>
+            <a:ext cx="628698" cy="461665"/>
+          </a:xfrm>
+          <a:prstGeom prst="rect">
+            <a:avLst/>
+          </a:prstGeom>
+          <a:noFill/>
+        </p:spPr>
+        <p:txBody>
+          <a:bodyPr wrap="none" rtlCol="0">
+            <a:spAutoFit/>
+          </a:bodyPr>
+          <a:lstStyle/>
+          <a:p>
+            <a:r>
+              <a:rPr lang="en-GB" sz="2400" b="1" dirty="0">
+                <a:solidFill>
+                  <a:schemeClr val="bg1"/>
+                </a:solidFill>
+              </a:rPr>
+              <a:t>5/7</a:t>
+            </a:r>
+          </a:p>
+        </p:txBody>
+      </p:sp>
+    </p:spTree>
+    <p:extLst>
+      <p:ext uri="{BB962C8B-B14F-4D97-AF65-F5344CB8AC3E}">
+        <p14:creationId xmlns:p14="http://schemas.microsoft.com/office/powerpoint/2010/main" val="956085408"/>
+      </p:ext>
+    </p:extLst>
+  </p:cSld>
+  <p:clrMapOvr>
+    <a:masterClrMapping/>
+  </p:clrMapOvr>
+</p:sld>
+</file>
+
+<file path=ppt/slides/slide7.xml><?xml version="1.0" encoding="utf-8"?>
+<p:sld xmlns:a="http://schemas.openxmlformats.org/drawingml/2006/main" xmlns:r="http://schemas.openxmlformats.org/officeDocument/2006/relationships" xmlns:p="http://schemas.openxmlformats.org/presentationml/2006/main">
+  <p:cSld>
+    <p:spTree>
+      <p:nvGrpSpPr>
+        <p:cNvPr id="1" name=""/>
+        <p:cNvGrpSpPr/>
+        <p:nvPr/>
+      </p:nvGrpSpPr>
+      <p:grpSpPr>
+        <a:xfrm>
+          <a:off x="0" y="0"/>
+          <a:ext cx="0" cy="0"/>
+          <a:chOff x="0" y="0"/>
+          <a:chExt cx="0" cy="0"/>
+        </a:xfrm>
+      </p:grpSpPr>
+      <p:sp>
+        <p:nvSpPr>
+          <p:cNvPr id="3" name="Subtitle 2"/>
+          <p:cNvSpPr>
+            <a:spLocks noGrp="1"/>
+          </p:cNvSpPr>
+          <p:nvPr>
+            <p:ph type="subTitle" idx="1"/>
+          </p:nvPr>
+        </p:nvSpPr>
+        <p:spPr>
+          <a:xfrm>
+            <a:off x="143508" y="836712"/>
+            <a:ext cx="8856984" cy="5688632"/>
+          </a:xfrm>
+        </p:spPr>
+        <p:txBody>
+          <a:bodyPr>
+            <a:noAutofit/>
+          </a:bodyPr>
+          <a:lstStyle/>
+          <a:p>
+            <a:r>
+              <a:rPr lang="en-GB" sz="3600" dirty="0">
+                <a:solidFill>
+                  <a:schemeClr val="bg1"/>
+                </a:solidFill>
+              </a:rPr>
+              <a:t>Oh I feel like dancing</a:t>
+            </a:r>
+          </a:p>
+          <a:p>
+            <a:r>
+              <a:rPr lang="en-GB" sz="3600" dirty="0">
+                <a:solidFill>
+                  <a:schemeClr val="bg1"/>
+                </a:solidFill>
+              </a:rPr>
+              <a:t>It's foolishness I know</a:t>
+            </a:r>
+          </a:p>
+          <a:p>
+            <a:r>
+              <a:rPr lang="en-GB" sz="3600" dirty="0">
+                <a:solidFill>
+                  <a:schemeClr val="bg1"/>
+                </a:solidFill>
+              </a:rPr>
+              <a:t>But when the world has seen the light</a:t>
+            </a:r>
+          </a:p>
+          <a:p>
+            <a:r>
+              <a:rPr lang="en-GB" sz="3600" dirty="0">
+                <a:solidFill>
+                  <a:schemeClr val="bg1"/>
+                </a:solidFill>
+              </a:rPr>
+              <a:t>They will dance with joy like we're dancing now</a:t>
+            </a:r>
+          </a:p>
+        </p:txBody>
+      </p:sp>
+      <p:sp>
+        <p:nvSpPr>
+          <p:cNvPr id="4" name="TextBox 3"/>
+          <p:cNvSpPr txBox="1"/>
+          <p:nvPr/>
+        </p:nvSpPr>
+        <p:spPr>
+          <a:xfrm>
+            <a:off x="8529729" y="0"/>
+            <a:ext cx="628698" cy="461665"/>
+          </a:xfrm>
+          <a:prstGeom prst="rect">
+            <a:avLst/>
+          </a:prstGeom>
+          <a:noFill/>
+        </p:spPr>
+        <p:txBody>
+          <a:bodyPr wrap="none" rtlCol="0">
+            <a:spAutoFit/>
+          </a:bodyPr>
+          <a:lstStyle/>
+          <a:p>
+            <a:r>
+              <a:rPr lang="en-GB" sz="2400" b="1" dirty="0">
+                <a:solidFill>
+                  <a:schemeClr val="bg1"/>
+                </a:solidFill>
+              </a:rPr>
+              <a:t>6/7</a:t>
             </a:r>
           </a:p>
         </p:txBody>
@@ -3621,6 +4017,150 @@
     <p:extLst>
       <p:ext uri="{BB962C8B-B14F-4D97-AF65-F5344CB8AC3E}">
         <p14:creationId xmlns:p14="http://schemas.microsoft.com/office/powerpoint/2010/main" val="3184770131"/>
+      </p:ext>
+    </p:extLst>
+  </p:cSld>
+  <p:clrMapOvr>
+    <a:masterClrMapping/>
+  </p:clrMapOvr>
+</p:sld>
+</file>
+
+<file path=ppt/slides/slide8.xml><?xml version="1.0" encoding="utf-8"?>
+<p:sld xmlns:a="http://schemas.openxmlformats.org/drawingml/2006/main" xmlns:r="http://schemas.openxmlformats.org/officeDocument/2006/relationships" xmlns:p="http://schemas.openxmlformats.org/presentationml/2006/main">
+  <p:cSld>
+    <p:spTree>
+      <p:nvGrpSpPr>
+        <p:cNvPr id="1" name="">
+          <a:extLst>
+            <a:ext uri="{FF2B5EF4-FFF2-40B4-BE49-F238E27FC236}">
+              <a16:creationId xmlns:a16="http://schemas.microsoft.com/office/drawing/2014/main" id="{6E726CF1-2D90-BEAB-E913-D92E814B9DE3}"/>
+            </a:ext>
+          </a:extLst>
+        </p:cNvPr>
+        <p:cNvGrpSpPr/>
+        <p:nvPr/>
+      </p:nvGrpSpPr>
+      <p:grpSpPr>
+        <a:xfrm>
+          <a:off x="0" y="0"/>
+          <a:ext cx="0" cy="0"/>
+          <a:chOff x="0" y="0"/>
+          <a:chExt cx="0" cy="0"/>
+        </a:xfrm>
+      </p:grpSpPr>
+      <p:sp>
+        <p:nvSpPr>
+          <p:cNvPr id="3" name="Subtitle 2">
+            <a:extLst>
+              <a:ext uri="{FF2B5EF4-FFF2-40B4-BE49-F238E27FC236}">
+                <a16:creationId xmlns:a16="http://schemas.microsoft.com/office/drawing/2014/main" id="{E4C9F558-A883-F557-9A63-EEFC4B437722}"/>
+              </a:ext>
+            </a:extLst>
+          </p:cNvPr>
+          <p:cNvSpPr>
+            <a:spLocks noGrp="1"/>
+          </p:cNvSpPr>
+          <p:nvPr>
+            <p:ph type="subTitle" idx="1"/>
+          </p:nvPr>
+        </p:nvSpPr>
+        <p:spPr>
+          <a:xfrm>
+            <a:off x="251520" y="836712"/>
+            <a:ext cx="8640960" cy="5400600"/>
+          </a:xfrm>
+        </p:spPr>
+        <p:txBody>
+          <a:bodyPr>
+            <a:noAutofit/>
+          </a:bodyPr>
+          <a:lstStyle/>
+          <a:p>
+            <a:r>
+              <a:rPr lang="en-GB" sz="3600" dirty="0">
+                <a:solidFill>
+                  <a:schemeClr val="bg1"/>
+                </a:solidFill>
+              </a:rPr>
+              <a:t>I could sing of Your love forever</a:t>
+            </a:r>
+          </a:p>
+          <a:p>
+            <a:r>
+              <a:rPr lang="en-GB" sz="3600" dirty="0">
+                <a:solidFill>
+                  <a:schemeClr val="bg1"/>
+                </a:solidFill>
+              </a:rPr>
+              <a:t>I could sing of Your love forever</a:t>
+            </a:r>
+          </a:p>
+          <a:p>
+            <a:r>
+              <a:rPr lang="en-GB" sz="3600" dirty="0">
+                <a:solidFill>
+                  <a:schemeClr val="bg1"/>
+                </a:solidFill>
+              </a:rPr>
+              <a:t>I could sing of Your love forever</a:t>
+            </a:r>
+          </a:p>
+          <a:p>
+            <a:r>
+              <a:rPr lang="en-GB" sz="3600" dirty="0">
+                <a:solidFill>
+                  <a:schemeClr val="bg1"/>
+                </a:solidFill>
+              </a:rPr>
+              <a:t>I could sing of Your love forever</a:t>
+            </a:r>
+          </a:p>
+        </p:txBody>
+      </p:sp>
+      <p:sp>
+        <p:nvSpPr>
+          <p:cNvPr id="4" name="TextBox 3">
+            <a:extLst>
+              <a:ext uri="{FF2B5EF4-FFF2-40B4-BE49-F238E27FC236}">
+                <a16:creationId xmlns:a16="http://schemas.microsoft.com/office/drawing/2014/main" id="{65BB7413-A5F0-39EE-9D4E-2C396F202415}"/>
+              </a:ext>
+            </a:extLst>
+          </p:cNvPr>
+          <p:cNvSpPr txBox="1"/>
+          <p:nvPr/>
+        </p:nvSpPr>
+        <p:spPr>
+          <a:xfrm>
+            <a:off x="8529729" y="0"/>
+            <a:ext cx="628698" cy="461665"/>
+          </a:xfrm>
+          <a:prstGeom prst="rect">
+            <a:avLst/>
+          </a:prstGeom>
+          <a:noFill/>
+        </p:spPr>
+        <p:txBody>
+          <a:bodyPr wrap="none" rtlCol="0">
+            <a:spAutoFit/>
+          </a:bodyPr>
+          <a:lstStyle/>
+          <a:p>
+            <a:r>
+              <a:rPr lang="en-GB" sz="2400" b="1" dirty="0">
+                <a:solidFill>
+                  <a:schemeClr val="bg1"/>
+                </a:solidFill>
+              </a:rPr>
+              <a:t>7/7</a:t>
+            </a:r>
+          </a:p>
+        </p:txBody>
+      </p:sp>
+    </p:spTree>
+    <p:extLst>
+      <p:ext uri="{BB962C8B-B14F-4D97-AF65-F5344CB8AC3E}">
+        <p14:creationId xmlns:p14="http://schemas.microsoft.com/office/powerpoint/2010/main" val="3873969246"/>
       </p:ext>
     </p:extLst>
   </p:cSld>
